--- a/s02/descargables/S02_ALU_01_Presentacion.pptx
+++ b/s02/descargables/S02_ALU_01_Presentacion.pptx
@@ -8607,7 +8607,7 @@
         </p:nvSpPr>
         <p:spPr>
           <a:xfrm>
-            <a:off x="548640" y="2578608"/>
+            <a:off x="548640" y="2340864"/>
             <a:ext cx="324612" cy="237744"/>
           </a:xfrm>
           <a:prstGeom prst="roundRect">
@@ -8634,7 +8634,7 @@
         </p:nvSpPr>
         <p:spPr>
           <a:xfrm>
-            <a:off x="548640" y="2578608"/>
+            <a:off x="548640" y="2340864"/>
             <a:ext cx="324612" cy="237744"/>
           </a:xfrm>
           <a:prstGeom prst="rect">
@@ -8673,7 +8673,7 @@
         </p:nvSpPr>
         <p:spPr>
           <a:xfrm>
-            <a:off x="873252" y="2578608"/>
+            <a:off x="873252" y="2340864"/>
             <a:ext cx="1620317" cy="237744"/>
           </a:xfrm>
           <a:prstGeom prst="roundRect">
@@ -8700,7 +8700,7 @@
         </p:nvSpPr>
         <p:spPr>
           <a:xfrm>
-            <a:off x="873252" y="2578608"/>
+            <a:off x="873252" y="2340864"/>
             <a:ext cx="1620317" cy="237744"/>
           </a:xfrm>
           <a:prstGeom prst="rect">
@@ -8739,7 +8739,7 @@
         </p:nvSpPr>
         <p:spPr>
           <a:xfrm>
-            <a:off x="2585009" y="2578608"/>
+            <a:off x="2585009" y="2340864"/>
             <a:ext cx="324612" cy="237744"/>
           </a:xfrm>
           <a:prstGeom prst="roundRect">
@@ -8766,7 +8766,7 @@
         </p:nvSpPr>
         <p:spPr>
           <a:xfrm>
-            <a:off x="2585009" y="2578608"/>
+            <a:off x="2585009" y="2340864"/>
             <a:ext cx="324612" cy="237744"/>
           </a:xfrm>
           <a:prstGeom prst="rect">
@@ -8805,7 +8805,7 @@
         </p:nvSpPr>
         <p:spPr>
           <a:xfrm>
-            <a:off x="2909621" y="2578608"/>
+            <a:off x="2909621" y="2340864"/>
             <a:ext cx="713232" cy="237744"/>
           </a:xfrm>
           <a:prstGeom prst="roundRect">
@@ -8832,7 +8832,7 @@
         </p:nvSpPr>
         <p:spPr>
           <a:xfrm>
-            <a:off x="2909621" y="2578608"/>
+            <a:off x="2909621" y="2340864"/>
             <a:ext cx="713232" cy="237744"/>
           </a:xfrm>
           <a:prstGeom prst="rect">
@@ -8871,7 +8871,7 @@
         </p:nvSpPr>
         <p:spPr>
           <a:xfrm>
-            <a:off x="3714293" y="2578608"/>
+            <a:off x="3714293" y="2340864"/>
             <a:ext cx="324612" cy="237744"/>
           </a:xfrm>
           <a:prstGeom prst="roundRect">
@@ -8898,7 +8898,7 @@
         </p:nvSpPr>
         <p:spPr>
           <a:xfrm>
-            <a:off x="3714293" y="2578608"/>
+            <a:off x="3714293" y="2340864"/>
             <a:ext cx="324612" cy="237744"/>
           </a:xfrm>
           <a:prstGeom prst="rect">
@@ -8937,7 +8937,7 @@
         </p:nvSpPr>
         <p:spPr>
           <a:xfrm>
-            <a:off x="4038905" y="2578608"/>
+            <a:off x="4038905" y="2340864"/>
             <a:ext cx="543154" cy="237744"/>
           </a:xfrm>
           <a:prstGeom prst="roundRect">
@@ -8964,7 +8964,7 @@
         </p:nvSpPr>
         <p:spPr>
           <a:xfrm>
-            <a:off x="4038905" y="2578608"/>
+            <a:off x="4038905" y="2340864"/>
             <a:ext cx="543154" cy="237744"/>
           </a:xfrm>
           <a:prstGeom prst="rect">
@@ -17116,7 +17116,7 @@
                 <a:ea typeface="Arial" pitchFamily="34" charset="-122"/>
                 <a:cs typeface="Arial" pitchFamily="34" charset="-120"/>
               </a:rPr>
-              <a:t>Tipo de persona y estructura</a:t>
+              <a:t>Tipo de persona</a:t>
             </a:r>
             <a:endParaRPr lang="en-US" sz="1050" dirty="0"/>
           </a:p>
